--- a/cac_mlops_architecture.pptx
+++ b/cac_mlops_architecture.pptx
@@ -3196,7 +3196,7 @@
                 </a:solidFill>
                 <a:latin typeface="Calibri"/>
               </a:rPr>
-              <a:t>Déclenché chaque juin · Publication officielle ONISR sur data.gouv.fr</a:t>
+              <a:t>Entraînement : 2021 → 2022 → 2023   ·   Production simulée : données 2024 via simulate_production.py</a:t>
             </a:r>
           </a:p>
         </p:txBody>
@@ -3555,7 +3555,7 @@
                 </a:solidFill>
                 <a:latin typeface="Calibri"/>
               </a:rPr>
-              <a:t>Téléchargement data.gouv.fr</a:t>
+              <a:t>data.gouv.fr API · FILENAMES mapping/année</a:t>
             </a:r>
           </a:p>
           <a:p>
@@ -4988,7 +4988,7 @@
                 </a:solidFill>
                 <a:latin typeface="Calibri"/>
               </a:rPr>
-              <a:t>Drift détecté → retrain auto</a:t>
+              <a:t>Evidently : ref=2021-23 · prod=2024 · retrain auto</a:t>
             </a:r>
           </a:p>
         </p:txBody>
@@ -5181,14 +5181,14 @@
         </p:nvSpPr>
         <p:spPr>
           <a:xfrm>
-            <a:off x="9162288" y="2295144"/>
-            <a:ext cx="36576" cy="1188720"/>
+            <a:off x="9235440" y="6016752"/>
+            <a:ext cx="2788920" cy="475488"/>
           </a:xfrm>
           <a:prstGeom prst="rect">
             <a:avLst/>
           </a:prstGeom>
           <a:solidFill>
-            <a:srgbClr val="F39C12"/>
+            <a:srgbClr val="0A2535"/>
           </a:solidFill>
           <a:ln>
             <a:noFill/>
@@ -5209,10 +5209,43 @@
           </a:fontRef>
         </p:style>
         <p:txBody>
-          <a:bodyPr rtlCol="0" anchor="ctr"/>
-          <a:lstStyle/>
-          <a:p>
-            <a:pPr algn="ctr"/>
+          <a:bodyPr rtlCol="0" anchor="ctr" wrap="square"/>
+          <a:lstStyle/>
+          <a:p>
+            <a:pPr algn="l"/>
+            <a:r>
+              <a:rPr sz="800" b="0">
+                <a:solidFill>
+                  <a:srgbClr val="00BCD4"/>
+                </a:solidFill>
+                <a:latin typeface="Calibri"/>
+              </a:rPr>
+              <a:t>données 2024 →</a:t>
+            </a:r>
+          </a:p>
+          <a:p>
+            <a:pPr algn="l"/>
+            <a:r>
+              <a:rPr sz="800" b="0">
+                <a:solidFill>
+                  <a:srgbClr val="00BCD4"/>
+                </a:solidFill>
+                <a:latin typeface="Calibri"/>
+              </a:rPr>
+              <a:t>simulate_production.py → Evidently</a:t>
+            </a:r>
+          </a:p>
+          <a:p>
+            <a:pPr algn="l"/>
+            <a:r>
+              <a:rPr sz="800" b="0">
+                <a:solidFill>
+                  <a:srgbClr val="00BCD4"/>
+                </a:solidFill>
+                <a:latin typeface="Calibri"/>
+              </a:rPr>
+              <a:t>ref:2021-23  prod:2024</a:t>
+            </a:r>
           </a:p>
         </p:txBody>
       </p:sp>
@@ -5224,14 +5257,14 @@
         </p:nvSpPr>
         <p:spPr>
           <a:xfrm>
-            <a:off x="164592" y="6675120"/>
-            <a:ext cx="11887200" cy="310896"/>
+            <a:off x="9162288" y="2295144"/>
+            <a:ext cx="36576" cy="1188720"/>
           </a:xfrm>
           <a:prstGeom prst="rect">
             <a:avLst/>
           </a:prstGeom>
           <a:solidFill>
-            <a:srgbClr val="2A304D"/>
+            <a:srgbClr val="F39C12"/>
           </a:solidFill>
           <a:ln>
             <a:noFill/>
@@ -5252,6 +5285,49 @@
           </a:fontRef>
         </p:style>
         <p:txBody>
+          <a:bodyPr rtlCol="0" anchor="ctr"/>
+          <a:lstStyle/>
+          <a:p>
+            <a:pPr algn="ctr"/>
+          </a:p>
+        </p:txBody>
+      </p:sp>
+      <p:sp>
+        <p:nvSpPr>
+          <p:cNvPr id="44" name="Rectangle 43"/>
+          <p:cNvSpPr/>
+          <p:nvPr/>
+        </p:nvSpPr>
+        <p:spPr>
+          <a:xfrm>
+            <a:off x="164592" y="6675120"/>
+            <a:ext cx="11887200" cy="310896"/>
+          </a:xfrm>
+          <a:prstGeom prst="rect">
+            <a:avLst/>
+          </a:prstGeom>
+          <a:solidFill>
+            <a:srgbClr val="2A304D"/>
+          </a:solidFill>
+          <a:ln>
+            <a:noFill/>
+          </a:ln>
+        </p:spPr>
+        <p:style>
+          <a:lnRef idx="1">
+            <a:schemeClr val="accent1"/>
+          </a:lnRef>
+          <a:fillRef idx="3">
+            <a:schemeClr val="accent1"/>
+          </a:fillRef>
+          <a:effectRef idx="2">
+            <a:schemeClr val="accent1"/>
+          </a:effectRef>
+          <a:fontRef idx="minor">
+            <a:schemeClr val="lt1"/>
+          </a:fontRef>
+        </p:style>
+        <p:txBody>
           <a:bodyPr rtlCol="0" anchor="ctr" wrap="square"/>
           <a:lstStyle/>
           <a:p>
@@ -5270,7 +5346,7 @@
       </p:sp>
       <p:sp>
         <p:nvSpPr>
-          <p:cNvPr id="44" name="Rectangle 43"/>
+          <p:cNvPr id="45" name="Rectangle 44"/>
           <p:cNvSpPr/>
           <p:nvPr/>
         </p:nvSpPr>
@@ -6745,7 +6821,7 @@
                 </a:solidFill>
                 <a:latin typeface="Calibri"/>
               </a:rPr>
-              <a:t>Détection drift features</a:t>
+              <a:t>ref: X_train 2021-2023</a:t>
             </a:r>
           </a:p>
           <a:p>
@@ -6757,7 +6833,7 @@
                 </a:solidFill>
                 <a:latin typeface="Calibri"/>
               </a:rPr>
-              <a:t>référence vs production</a:t>
+              <a:t>prod: données 2024 (simulate_prod.py)</a:t>
             </a:r>
           </a:p>
         </p:txBody>

--- a/cac_mlops_architecture.pptx
+++ b/cac_mlops_architecture.pptx
@@ -7,6 +7,7 @@
   <p:sldIdLst>
     <p:sldId id="256" r:id="rId7"/>
     <p:sldId id="257" r:id="rId8"/>
+    <p:sldId id="258" r:id="rId9"/>
   </p:sldIdLst>
   <p:sldSz cx="12188952" cy="6858000" type="screen4x3"/>
   <p:notesSz cx="6858000" cy="9144000"/>
@@ -6975,7 +6976,7 @@
                 </a:solidFill>
                 <a:latin typeface="Calibri"/>
               </a:rPr>
-              <a:t>Services sur localhost · MinIO (S3 local) · MLflow :5000 · Prefect :4200 · pytest · flake8</a:t>
+              <a:t>Services sur localhost · MinIO (S3 local) · MLflow :5000 · API :8080 · pytest · flake8</a:t>
             </a:r>
           </a:p>
         </p:txBody>
@@ -7029,7 +7030,7 @@
                 </a:solidFill>
                 <a:latin typeface="Calibri"/>
               </a:rPr>
-              <a:t>SCALEWAY — Kubernetes (Kapsule)</a:t>
+              <a:t>SCALEWAY ACTUEL (Phase 1+2) — Docker Compose · scw-jovial-dubinsky</a:t>
             </a:r>
           </a:p>
           <a:p>
@@ -7041,7 +7042,7 @@
                 </a:solidFill>
                 <a:latin typeface="Calibri"/>
               </a:rPr>
-              <a:t>N replicas API · Object Storage · Managed DB · Container Registry · GitHub Actions CI/CD</a:t>
+              <a:t>4 containers : PostgreSQL · MinIO · MLflow · API :8080 · GitHub Actions CI/CD</a:t>
             </a:r>
           </a:p>
         </p:txBody>
@@ -7241,6 +7242,433 @@
                 <a:latin typeface="Calibri"/>
               </a:rPr>
               <a:t>  Git (code)  ·  DVC (données)  ·  MLflow (modèles)  ·  Pandera (validation)  ·  Prefect (orchestration)  ·  NGINX (sécurité)  ·  Evidently (drift)  ·  Prometheus/Grafana (monitoring)</a:t>
+            </a:r>
+          </a:p>
+        </p:txBody>
+      </p:sp>
+    </p:spTree>
+  </p:cSld>
+  <p:clrMapOvr>
+    <a:masterClrMapping/>
+  </p:clrMapOvr>
+</p:sld>
+</file>
+
+<file path=ppt/slides/slide3.xml><?xml version="1.0" encoding="utf-8"?>
+<p:sld xmlns:a="http://schemas.openxmlformats.org/drawingml/2006/main" xmlns:p="http://schemas.openxmlformats.org/presentationml/2006/main" xmlns:r="http://schemas.openxmlformats.org/officeDocument/2006/relationships">
+  <p:cSld>
+    <p:bg>
+      <p:bgPr>
+        <a:solidFill>
+          <a:srgbClr val="1F3564"/>
+        </a:solidFill>
+        <a:effectLst/>
+      </p:bgPr>
+    </p:bg>
+    <p:spTree>
+      <p:nvGrpSpPr>
+        <p:cNvPr id="1" name=""/>
+        <p:cNvGrpSpPr/>
+        <p:nvPr/>
+      </p:nvGrpSpPr>
+      <p:grpSpPr/>
+      <p:sp>
+        <p:nvSpPr>
+          <p:cNvPr id="2" name="TextBox 1"/>
+          <p:cNvSpPr txBox="1"/>
+          <p:nvPr/>
+        </p:nvSpPr>
+        <p:spPr>
+          <a:xfrm>
+            <a:off x="365760" y="182880"/>
+            <a:ext cx="10972800" cy="640080"/>
+          </a:xfrm>
+          <a:prstGeom prst="rect">
+            <a:avLst/>
+          </a:prstGeom>
+          <a:noFill/>
+        </p:spPr>
+        <p:txBody>
+          <a:bodyPr wrap="square">
+            <a:spAutoFit/>
+          </a:bodyPr>
+          <a:lstStyle/>
+          <a:p>
+            <a:pPr algn="ctr"/>
+            <a:r>
+              <a:rPr sz="2800" b="1">
+                <a:solidFill>
+                  <a:srgbClr val="FFFFFF"/>
+                </a:solidFill>
+              </a:rPr>
+              <a:t>Workflow Collaboratif — Git · CI · CD</a:t>
+            </a:r>
+          </a:p>
+        </p:txBody>
+      </p:sp>
+      <p:sp>
+        <p:nvSpPr>
+          <p:cNvPr id="3" name="TextBox 2"/>
+          <p:cNvSpPr txBox="1"/>
+          <p:nvPr/>
+        </p:nvSpPr>
+        <p:spPr>
+          <a:xfrm>
+            <a:off x="365760" y="822960"/>
+            <a:ext cx="10972800" cy="365760"/>
+          </a:xfrm>
+          <a:prstGeom prst="rect">
+            <a:avLst/>
+          </a:prstGeom>
+          <a:noFill/>
+        </p:spPr>
+        <p:txBody>
+          <a:bodyPr wrap="square">
+            <a:spAutoFit/>
+          </a:bodyPr>
+          <a:lstStyle/>
+          <a:p>
+            <a:pPr algn="ctr"/>
+            <a:r>
+              <a:rPr sz="1400" b="0">
+                <a:solidFill>
+                  <a:srgbClr val="FF6B00"/>
+                </a:solidFill>
+              </a:rPr>
+              <a:t>jacques / noel  →  PR  →  main  →  deploy automatique Scaleway</a:t>
+            </a:r>
+          </a:p>
+        </p:txBody>
+      </p:sp>
+      <p:sp>
+        <p:nvSpPr>
+          <p:cNvPr id="4" name="TextBox 3"/>
+          <p:cNvSpPr txBox="1"/>
+          <p:nvPr/>
+        </p:nvSpPr>
+        <p:spPr>
+          <a:xfrm>
+            <a:off x="365760" y="1371600"/>
+            <a:ext cx="2926080" cy="411480"/>
+          </a:xfrm>
+          <a:prstGeom prst="rect">
+            <a:avLst/>
+          </a:prstGeom>
+          <a:solidFill>
+            <a:srgbClr val="0070C0"/>
+          </a:solidFill>
+        </p:spPr>
+        <p:txBody>
+          <a:bodyPr wrap="square">
+            <a:spAutoFit/>
+          </a:bodyPr>
+          <a:lstStyle/>
+          <a:p>
+            <a:pPr algn="ctr"/>
+            <a:r>
+              <a:rPr sz="1300" b="1">
+                <a:solidFill>
+                  <a:srgbClr val="FFFFFF"/>
+                </a:solidFill>
+              </a:rPr>
+              <a:t>BRANCHES</a:t>
+            </a:r>
+          </a:p>
+        </p:txBody>
+      </p:sp>
+      <p:sp>
+        <p:nvSpPr>
+          <p:cNvPr id="5" name="TextBox 4"/>
+          <p:cNvSpPr txBox="1"/>
+          <p:nvPr/>
+        </p:nvSpPr>
+        <p:spPr>
+          <a:xfrm>
+            <a:off x="365760" y="1828800"/>
+            <a:ext cx="2926080" cy="1097280"/>
+          </a:xfrm>
+          <a:prstGeom prst="rect">
+            <a:avLst/>
+          </a:prstGeom>
+          <a:noFill/>
+        </p:spPr>
+        <p:txBody>
+          <a:bodyPr wrap="square">
+            <a:spAutoFit/>
+          </a:bodyPr>
+          <a:lstStyle/>
+          <a:p>
+            <a:pPr algn="l"/>
+            <a:r>
+              <a:rPr sz="1200" b="0">
+                <a:solidFill>
+                  <a:srgbClr val="FFFFFF"/>
+                </a:solidFill>
+              </a:rPr>
+              <a:t>jacques  →  commits libres de Jacques
+noel       →  commits libres de Noël
+main       →  pas de commit direct
+               uniquement via Pull Request</a:t>
+            </a:r>
+          </a:p>
+        </p:txBody>
+      </p:sp>
+      <p:sp>
+        <p:nvSpPr>
+          <p:cNvPr id="6" name="TextBox 5"/>
+          <p:cNvSpPr txBox="1"/>
+          <p:nvPr/>
+        </p:nvSpPr>
+        <p:spPr>
+          <a:xfrm>
+            <a:off x="3566160" y="1371600"/>
+            <a:ext cx="3291840" cy="411480"/>
+          </a:xfrm>
+          <a:prstGeom prst="rect">
+            <a:avLst/>
+          </a:prstGeom>
+          <a:solidFill>
+            <a:srgbClr val="0070C0"/>
+          </a:solidFill>
+        </p:spPr>
+        <p:txBody>
+          <a:bodyPr wrap="square">
+            <a:spAutoFit/>
+          </a:bodyPr>
+          <a:lstStyle/>
+          <a:p>
+            <a:pPr algn="ctr"/>
+            <a:r>
+              <a:rPr sz="1300" b="1">
+                <a:solidFill>
+                  <a:srgbClr val="FFFFFF"/>
+                </a:solidFill>
+              </a:rPr>
+              <a:t>ci.yml  —  lint + tests</a:t>
+            </a:r>
+          </a:p>
+        </p:txBody>
+      </p:sp>
+      <p:sp>
+        <p:nvSpPr>
+          <p:cNvPr id="7" name="TextBox 6"/>
+          <p:cNvSpPr txBox="1"/>
+          <p:nvPr/>
+        </p:nvSpPr>
+        <p:spPr>
+          <a:xfrm>
+            <a:off x="3566160" y="1828800"/>
+            <a:ext cx="3291840" cy="2011680"/>
+          </a:xfrm>
+          <a:prstGeom prst="rect">
+            <a:avLst/>
+          </a:prstGeom>
+          <a:noFill/>
+        </p:spPr>
+        <p:txBody>
+          <a:bodyPr wrap="square">
+            <a:spAutoFit/>
+          </a:bodyPr>
+          <a:lstStyle/>
+          <a:p>
+            <a:pPr algn="l"/>
+            <a:r>
+              <a:rPr sz="1100" b="0">
+                <a:solidFill>
+                  <a:srgbClr val="FFFFFF"/>
+                </a:solidFill>
+              </a:rPr>
+              <a:t>Déclenché sur : push jacques/noel
+                          PR vers main
+1. pip install requirements
+2. flake8  (erreurs bloquantes)
+3. pytest tests/unit/
+✗ échoue  →  PR bloquée
+✓ passe   →  merge autorisé</a:t>
+            </a:r>
+          </a:p>
+        </p:txBody>
+      </p:sp>
+      <p:sp>
+        <p:nvSpPr>
+          <p:cNvPr id="8" name="TextBox 7"/>
+          <p:cNvSpPr txBox="1"/>
+          <p:nvPr/>
+        </p:nvSpPr>
+        <p:spPr>
+          <a:xfrm>
+            <a:off x="7132320" y="1371600"/>
+            <a:ext cx="4023360" cy="411480"/>
+          </a:xfrm>
+          <a:prstGeom prst="rect">
+            <a:avLst/>
+          </a:prstGeom>
+          <a:solidFill>
+            <a:srgbClr val="00874A"/>
+          </a:solidFill>
+        </p:spPr>
+        <p:txBody>
+          <a:bodyPr wrap="square">
+            <a:spAutoFit/>
+          </a:bodyPr>
+          <a:lstStyle/>
+          <a:p>
+            <a:pPr algn="ctr"/>
+            <a:r>
+              <a:rPr sz="1300" b="1">
+                <a:solidFill>
+                  <a:srgbClr val="FFFFFF"/>
+                </a:solidFill>
+              </a:rPr>
+              <a:t>deploy.yml  —  SSH deploy</a:t>
+            </a:r>
+          </a:p>
+        </p:txBody>
+      </p:sp>
+      <p:sp>
+        <p:nvSpPr>
+          <p:cNvPr id="9" name="TextBox 8"/>
+          <p:cNvSpPr txBox="1"/>
+          <p:nvPr/>
+        </p:nvSpPr>
+        <p:spPr>
+          <a:xfrm>
+            <a:off x="7132320" y="1828800"/>
+            <a:ext cx="4023360" cy="2011680"/>
+          </a:xfrm>
+          <a:prstGeom prst="rect">
+            <a:avLst/>
+          </a:prstGeom>
+          <a:noFill/>
+        </p:spPr>
+        <p:txBody>
+          <a:bodyPr wrap="square">
+            <a:spAutoFit/>
+          </a:bodyPr>
+          <a:lstStyle/>
+          <a:p>
+            <a:pPr algn="l"/>
+            <a:r>
+              <a:rPr sz="1100" b="0">
+                <a:solidFill>
+                  <a:srgbClr val="FFFFFF"/>
+                </a:solidFill>
+              </a:rPr>
+              <a:t>Déclenché sur : merge dans main
+1. SSH → deploy@51.159.187.132
+2. git reset --hard origin/main
+3. dvc pull  (données Scaleway S3)
+4. docker compose down &amp;&amp; up --build
+5. curl :8080/health  (retry 90s max)
+✗ timeout  →  logs API + exit 1
+✓ API OK  →  deploy terminé</a:t>
+            </a:r>
+          </a:p>
+        </p:txBody>
+      </p:sp>
+      <p:sp>
+        <p:nvSpPr>
+          <p:cNvPr id="10" name="TextBox 9"/>
+          <p:cNvSpPr txBox="1"/>
+          <p:nvPr/>
+        </p:nvSpPr>
+        <p:spPr>
+          <a:xfrm>
+            <a:off x="365760" y="3977639"/>
+            <a:ext cx="10789920" cy="365760"/>
+          </a:xfrm>
+          <a:prstGeom prst="rect">
+            <a:avLst/>
+          </a:prstGeom>
+          <a:solidFill>
+            <a:srgbClr val="FF6B00"/>
+          </a:solidFill>
+        </p:spPr>
+        <p:txBody>
+          <a:bodyPr wrap="square">
+            <a:spAutoFit/>
+          </a:bodyPr>
+          <a:lstStyle/>
+          <a:p>
+            <a:pPr algn="ctr"/>
+            <a:r>
+              <a:rPr sz="1300" b="1">
+                <a:solidFill>
+                  <a:srgbClr val="FFFFFF"/>
+                </a:solidFill>
+              </a:rPr>
+              <a:t>WORKFLOW QUOTIDIEN</a:t>
+            </a:r>
+          </a:p>
+        </p:txBody>
+      </p:sp>
+      <p:sp>
+        <p:nvSpPr>
+          <p:cNvPr id="11" name="TextBox 10"/>
+          <p:cNvSpPr txBox="1"/>
+          <p:nvPr/>
+        </p:nvSpPr>
+        <p:spPr>
+          <a:xfrm>
+            <a:off x="365760" y="4389120"/>
+            <a:ext cx="10789920" cy="1280160"/>
+          </a:xfrm>
+          <a:prstGeom prst="rect">
+            <a:avLst/>
+          </a:prstGeom>
+          <a:noFill/>
+        </p:spPr>
+        <p:txBody>
+          <a:bodyPr wrap="square">
+            <a:spAutoFit/>
+          </a:bodyPr>
+          <a:lstStyle/>
+          <a:p>
+            <a:pPr algn="l"/>
+            <a:r>
+              <a:rPr sz="1100" b="0">
+                <a:solidFill>
+                  <a:srgbClr val="FFFFFF"/>
+                </a:solidFill>
+              </a:rPr>
+              <a:t>git fetch origin &amp;&amp; git merge origin/main     # récupère les modifs du collègue
+git add src/...  &amp;&amp;  git commit -m 'feat: ...'     # travail sur ta branche
+dvc push                                                    # pousse les données → Scaleway Object Storage
+git push origin jacques                                 # puis ouvrir une PR sur GitHub  →  merge  →  deploy auto</a:t>
+            </a:r>
+          </a:p>
+        </p:txBody>
+      </p:sp>
+      <p:sp>
+        <p:nvSpPr>
+          <p:cNvPr id="12" name="TextBox 11"/>
+          <p:cNvSpPr txBox="1"/>
+          <p:nvPr/>
+        </p:nvSpPr>
+        <p:spPr>
+          <a:xfrm>
+            <a:off x="365760" y="5806440"/>
+            <a:ext cx="10789920" cy="320040"/>
+          </a:xfrm>
+          <a:prstGeom prst="rect">
+            <a:avLst/>
+          </a:prstGeom>
+          <a:noFill/>
+        </p:spPr>
+        <p:txBody>
+          <a:bodyPr wrap="square">
+            <a:spAutoFit/>
+          </a:bodyPr>
+          <a:lstStyle/>
+          <a:p>
+            <a:pPr algn="ctr"/>
+            <a:r>
+              <a:rPr sz="1000" b="0">
+                <a:solidFill>
+                  <a:srgbClr val="FF6B00"/>
+                </a:solidFill>
+              </a:rPr>
+              <a:t>Liora — MLOps Accidents</a:t>
             </a:r>
           </a:p>
         </p:txBody>

--- a/cac_mlops_architecture.pptx
+++ b/cac_mlops_architecture.pptx
@@ -6976,7 +6976,7 @@
                 </a:solidFill>
                 <a:latin typeface="Calibri"/>
               </a:rPr>
-              <a:t>Services sur localhost · MinIO (S3 local) · MLflow :5000 · API :8080 · pytest · flake8</a:t>
+              <a:t>Services sur localhost · MinIO (S3 local) · MLflow :5001 · API :8080 · pytest · flake8</a:t>
             </a:r>
           </a:p>
         </p:txBody>
@@ -7042,7 +7042,8 @@
                 </a:solidFill>
                 <a:latin typeface="Calibri"/>
               </a:rPr>
-              <a:t>4 containers : PostgreSQL · MinIO · MLflow · API :8080 · GitHub Actions CI/CD</a:t>
+              <a:t>4 containers : PostgreSQL · MinIO · MLflow v3.1.0 · API :8080 · GitHub Actions CI/CD
+Modèle @Production : accuracy=0.777 · f1=0.648 · auc=0.838 · recall=0.593</a:t>
             </a:r>
           </a:p>
         </p:txBody>
